--- a/assets/ppts/M4.1_Network_Management_SNMP.pptx
+++ b/assets/ppts/M4.1_Network_Management_SNMP.pptx
@@ -3142,8 +3142,8 @@
         </p:nvSpPr>
         <p:spPr>
           <a:xfrm>
-            <a:off x="822960" y="1188720"/>
-            <a:ext cx="164592" cy="4480560"/>
+            <a:off x="0" y="0"/>
+            <a:ext cx="12191695" cy="137160"/>
           </a:xfrm>
           <a:prstGeom prst="rect">
             <a:avLst/>
@@ -3179,14 +3179,57 @@
       </p:sp>
       <p:sp>
         <p:nvSpPr>
-          <p:cNvPr id="4" name="TextBox 3"/>
+          <p:cNvPr id="4" name="Rectangle 3"/>
+          <p:cNvSpPr/>
+          <p:nvPr/>
+        </p:nvSpPr>
+        <p:spPr>
+          <a:xfrm>
+            <a:off x="822960" y="1097280"/>
+            <a:ext cx="164592" cy="4663440"/>
+          </a:xfrm>
+          <a:prstGeom prst="rect">
+            <a:avLst/>
+          </a:prstGeom>
+          <a:solidFill>
+            <a:srgbClr val="D97706"/>
+          </a:solidFill>
+          <a:ln>
+            <a:noFill/>
+          </a:ln>
+        </p:spPr>
+        <p:style>
+          <a:lnRef idx="1">
+            <a:schemeClr val="accent1"/>
+          </a:lnRef>
+          <a:fillRef idx="3">
+            <a:schemeClr val="accent1"/>
+          </a:fillRef>
+          <a:effectRef idx="2">
+            <a:schemeClr val="accent1"/>
+          </a:effectRef>
+          <a:fontRef idx="minor">
+            <a:schemeClr val="lt1"/>
+          </a:fontRef>
+        </p:style>
+        <p:txBody>
+          <a:bodyPr rtlCol="0" anchor="ctr"/>
+          <a:lstStyle/>
+          <a:p>
+            <a:pPr algn="ctr"/>
+          </a:p>
+        </p:txBody>
+      </p:sp>
+      <p:sp>
+        <p:nvSpPr>
+          <p:cNvPr id="5" name="TextBox 4"/>
           <p:cNvSpPr txBox="1"/>
           <p:nvPr/>
         </p:nvSpPr>
         <p:spPr>
           <a:xfrm>
-            <a:off x="1280160" y="1097280"/>
-            <a:ext cx="10058400" cy="4663440"/>
+            <a:off x="1234440" y="1005840"/>
+            <a:ext cx="10241280" cy="4846320"/>
           </a:xfrm>
           <a:prstGeom prst="rect">
             <a:avLst/>
@@ -3201,70 +3244,165 @@
           <a:p>
             <a:pPr>
               <a:spcAft>
+                <a:spcPts val="1000"/>
+              </a:spcAft>
+              <a:defRPr b="1" sz="1300">
+                <a:solidFill>
+                  <a:srgbClr val="D97706"/>
+                </a:solidFill>
+              </a:defRPr>
+            </a:pPr>
+            <a:r>
+              <a:t>PCCST501 Computer Networks | KTU 2024 Scheme • MODULE 4 • M4.1</a:t>
+            </a:r>
+          </a:p>
+          <a:p>
+            <a:pPr>
+              <a:spcAft>
                 <a:spcPts val="1200"/>
               </a:spcAft>
-              <a:defRPr b="1" sz="1300">
-                <a:solidFill>
-                  <a:srgbClr val="D97706"/>
+              <a:defRPr b="1" sz="3000">
+                <a:solidFill>
+                  <a:srgbClr val="F8FAFC"/>
                 </a:solidFill>
               </a:defRPr>
             </a:pPr>
             <a:r>
-              <a:t>PCCST501 Computer Networks | KTU 2024 Scheme • MODULE 4 • M4.1</a:t>
+              <a:t>Network Management Architecture &amp; SNMP Protocol</a:t>
             </a:r>
           </a:p>
           <a:p>
             <a:pPr>
               <a:spcAft>
-                <a:spcPts val="1400"/>
+                <a:spcPts val="2400"/>
               </a:spcAft>
-              <a:defRPr b="1" sz="3200">
-                <a:solidFill>
-                  <a:srgbClr val="F8FAFC"/>
+              <a:defRPr sz="1600">
+                <a:solidFill>
+                  <a:srgbClr val="94A3B8"/>
                 </a:solidFill>
               </a:defRPr>
             </a:pPr>
             <a:r>
-              <a:t>Network Management &amp; SNMP Architecture</a:t>
+              <a:t>Managing Entities (Managers), Managed Devices (Agents), MIB, SNMP Protocol Operations, SNMPv1 vs SNMPv2c vs SNMPv3 (USM &amp; VACM)</a:t>
             </a:r>
           </a:p>
           <a:p>
             <a:pPr>
               <a:spcAft>
-                <a:spcPts val="2800"/>
+                <a:spcPts val="300"/>
               </a:spcAft>
-              <a:defRPr sz="1700">
+              <a:defRPr b="1" sz="1350">
+                <a:solidFill>
+                  <a:srgbClr val="E2E8F0"/>
+                </a:solidFill>
+              </a:defRPr>
+            </a:pPr>
+            <a:r>
+              <a:t>Prepared by: Prof. Anju Markose | Assistant Professor, Dept. of CSE | VJCET</a:t>
+            </a:r>
+          </a:p>
+          <a:p>
+            <a:pPr>
+              <a:defRPr sz="1150">
                 <a:solidFill>
                   <a:srgbClr val="94A3B8"/>
                 </a:solidFill>
               </a:defRPr>
             </a:pPr>
             <a:r>
-              <a:t>Framework Components (NMS, Agent, MIB), SNMP Protocol Operations (UDP 161/162), Evolution: SNMPv1 vs SNMPv2c vs SNMPv3</a:t>
-            </a:r>
-          </a:p>
+              <a:t>Viswajyothi College of Engineering and Technology (VJCET), Vazhakulam • KTU S5 CSE</a:t>
+            </a:r>
+          </a:p>
+        </p:txBody>
+      </p:sp>
+      <p:sp>
+        <p:nvSpPr>
+          <p:cNvPr id="6" name="Rounded Rectangle 5"/>
+          <p:cNvSpPr/>
+          <p:nvPr/>
+        </p:nvSpPr>
+        <p:spPr>
+          <a:xfrm>
+            <a:off x="8412480" y="5120640"/>
+            <a:ext cx="3017520" cy="822960"/>
+          </a:xfrm>
+          <a:prstGeom prst="roundRect">
+            <a:avLst/>
+          </a:prstGeom>
+          <a:solidFill>
+            <a:srgbClr val="1E293B"/>
+          </a:solidFill>
+          <a:ln w="12700">
+            <a:solidFill>
+              <a:srgbClr val="0E7490"/>
+            </a:solidFill>
+          </a:ln>
+        </p:spPr>
+        <p:style>
+          <a:lnRef idx="1">
+            <a:schemeClr val="accent1"/>
+          </a:lnRef>
+          <a:fillRef idx="3">
+            <a:schemeClr val="accent1"/>
+          </a:fillRef>
+          <a:effectRef idx="2">
+            <a:schemeClr val="accent1"/>
+          </a:effectRef>
+          <a:fontRef idx="minor">
+            <a:schemeClr val="lt1"/>
+          </a:fontRef>
+        </p:style>
+        <p:txBody>
+          <a:bodyPr rtlCol="0" anchor="ctr"/>
+          <a:lstStyle/>
+          <a:p>
+            <a:pPr algn="ctr"/>
+          </a:p>
+        </p:txBody>
+      </p:sp>
+      <p:sp>
+        <p:nvSpPr>
+          <p:cNvPr id="7" name="TextBox 6"/>
+          <p:cNvSpPr txBox="1"/>
+          <p:nvPr/>
+        </p:nvSpPr>
+        <p:spPr>
+          <a:xfrm>
+            <a:off x="8503920" y="5166360"/>
+            <a:ext cx="2834640" cy="731520"/>
+          </a:xfrm>
+          <a:prstGeom prst="rect">
+            <a:avLst/>
+          </a:prstGeom>
+          <a:noFill/>
+        </p:spPr>
+        <p:txBody>
+          <a:bodyPr wrap="none">
+            <a:spAutoFit/>
+          </a:bodyPr>
+          <a:lstStyle/>
           <a:p>
             <a:pPr>
-              <a:defRPr b="1" sz="1300">
-                <a:solidFill>
-                  <a:srgbClr val="E2E8F0"/>
+              <a:defRPr b="1" sz="1050">
+                <a:solidFill>
+                  <a:srgbClr val="D97706"/>
                 </a:solidFill>
               </a:defRPr>
             </a:pPr>
             <a:r>
-              <a:t>Prepared by: Prof. Anju Markose | Assistant Professor, Dept. of CSE | VJCET</a:t>
+              <a:t>KTU B.Tech Curriculum</a:t>
             </a:r>
           </a:p>
           <a:p>
             <a:pPr>
-              <a:defRPr sz="1100">
-                <a:solidFill>
-                  <a:srgbClr val="94A3B8"/>
+              <a:defRPr sz="950">
+                <a:solidFill>
+                  <a:srgbClr val="F8FAFC"/>
                 </a:solidFill>
               </a:defRPr>
             </a:pPr>
             <a:r>
-              <a:t>Viswajyothi College of Engineering and Technology (VJCET), Vazhakulam</a:t>
+              <a:t>Official Classroom Slide Deck</a:t>
             </a:r>
           </a:p>
         </p:txBody>
@@ -3396,14 +3534,14 @@
           <a:lstStyle/>
           <a:p>
             <a:pPr>
-              <a:defRPr b="1" sz="2300">
+              <a:defRPr b="1" sz="2200">
                 <a:solidFill>
                   <a:srgbClr val="F8FAFC"/>
                 </a:solidFill>
               </a:defRPr>
             </a:pPr>
             <a:r>
-              <a:t>4.1.1 Network Management Framework Components</a:t>
+              <a:t>4.1.1 Network Management Framework &amp; SNMP Operations</a:t>
             </a:r>
           </a:p>
         </p:txBody>
@@ -3451,7 +3589,7 @@
         </p:nvSpPr>
         <p:spPr>
           <a:xfrm>
-            <a:off x="731520" y="1280160"/>
+            <a:off x="731520" y="1234440"/>
             <a:ext cx="6858000" cy="4937760"/>
           </a:xfrm>
           <a:prstGeom prst="rect">
@@ -3469,29 +3607,29 @@
               <a:spcAft>
                 <a:spcPts val="200"/>
               </a:spcAft>
-              <a:defRPr b="1" sz="1500">
+              <a:defRPr b="1" sz="1450">
                 <a:solidFill>
                   <a:srgbClr val="0F1E4A"/>
                 </a:solidFill>
               </a:defRPr>
             </a:pPr>
             <a:r>
-              <a:t>• Network Management Framework</a:t>
+              <a:t>• Network Management Architecture</a:t>
             </a:r>
           </a:p>
           <a:p>
             <a:pPr>
               <a:spcAft>
-                <a:spcPts val="800"/>
+                <a:spcPts val="700"/>
               </a:spcAft>
-              <a:defRPr sz="1300">
-                <a:solidFill>
-                  <a:srgbClr val="1E293B"/>
+              <a:defRPr sz="1250">
+                <a:solidFill>
+                  <a:srgbClr val="0F172A"/>
                 </a:solidFill>
               </a:defRPr>
             </a:pPr>
             <a:r>
-              <a:t>   Consists of 4 fundamental components: Managing Entity, Managed Devices, Management Agents, and Management Information Base.</a:t>
+              <a:t>   Consists of 4 pillars: 1. **Managing Entity (Manager / NMS)**: Centralized workstation running management software. 2. **Managed Devices**: Routers, switches, servers, hosts containing management data. 3. **Management Agent**: Software daemon running inside managed device. 4. **Management Information Base (MIB)**: Virtual database of manageable object variables.</a:t>
             </a:r>
           </a:p>
           <a:p>
@@ -3499,29 +3637,29 @@
               <a:spcAft>
                 <a:spcPts val="200"/>
               </a:spcAft>
-              <a:defRPr b="1" sz="1500">
+              <a:defRPr b="1" sz="1450">
                 <a:solidFill>
                   <a:srgbClr val="0F1E4A"/>
                 </a:solidFill>
               </a:defRPr>
             </a:pPr>
             <a:r>
-              <a:t>• Managing Entity (NMS - Network Management System)</a:t>
+              <a:t>• SNMP Protocol (Simple Network Management Protocol - RFC 3411)</a:t>
             </a:r>
           </a:p>
           <a:p>
             <a:pPr>
               <a:spcAft>
-                <a:spcPts val="800"/>
+                <a:spcPts val="700"/>
               </a:spcAft>
-              <a:defRPr sz="1300">
-                <a:solidFill>
-                  <a:srgbClr val="1E293B"/>
+              <a:defRPr sz="1250">
+                <a:solidFill>
+                  <a:srgbClr val="0F172A"/>
                 </a:solidFill>
               </a:defRPr>
             </a:pPr>
             <a:r>
-              <a:t>   Central workstation executing network management applications. Polls agents, receives alerts, and presents graphical dashboards.</a:t>
+              <a:t>   Operates over UDP port 161 (Manager to Agent queries) and UDP port 162 (Agent to Manager asynchronous Traps).</a:t>
             </a:r>
           </a:p>
           <a:p>
@@ -3529,89 +3667,29 @@
               <a:spcAft>
                 <a:spcPts val="200"/>
               </a:spcAft>
-              <a:defRPr b="1" sz="1500">
+              <a:defRPr b="1" sz="1450">
                 <a:solidFill>
                   <a:srgbClr val="0F1E4A"/>
                 </a:solidFill>
               </a:defRPr>
             </a:pPr>
             <a:r>
-              <a:t>• Managed Device &amp; Agent</a:t>
+              <a:t>• Core SNMP Protocol Operations</a:t>
             </a:r>
           </a:p>
           <a:p>
             <a:pPr>
               <a:spcAft>
-                <a:spcPts val="800"/>
+                <a:spcPts val="700"/>
               </a:spcAft>
-              <a:defRPr sz="1300">
-                <a:solidFill>
-                  <a:srgbClr val="1E293B"/>
+              <a:defRPr sz="1250">
+                <a:solidFill>
+                  <a:srgbClr val="0F172A"/>
                 </a:solidFill>
               </a:defRPr>
             </a:pPr>
             <a:r>
-              <a:t>   Routers, switches, servers running an SNMP Management Agent software module that collects local operational metrics and executes configuration commands.</a:t>
-            </a:r>
-          </a:p>
-          <a:p>
-            <a:pPr>
-              <a:spcAft>
-                <a:spcPts val="200"/>
-              </a:spcAft>
-              <a:defRPr b="1" sz="1500">
-                <a:solidFill>
-                  <a:srgbClr val="0F1E4A"/>
-                </a:solidFill>
-              </a:defRPr>
-            </a:pPr>
-            <a:r>
-              <a:t>• Management Information Base (MIB)</a:t>
-            </a:r>
-          </a:p>
-          <a:p>
-            <a:pPr>
-              <a:spcAft>
-                <a:spcPts val="800"/>
-              </a:spcAft>
-              <a:defRPr sz="1300">
-                <a:solidFill>
-                  <a:srgbClr val="1E293B"/>
-                </a:solidFill>
-              </a:defRPr>
-            </a:pPr>
-            <a:r>
-              <a:t>   Hierarchical structured collection of managed object variables maintained inside each device (e.g., packets transmitted, CPU utilization, interface status).</a:t>
-            </a:r>
-          </a:p>
-          <a:p>
-            <a:pPr>
-              <a:spcAft>
-                <a:spcPts val="200"/>
-              </a:spcAft>
-              <a:defRPr b="1" sz="1500">
-                <a:solidFill>
-                  <a:srgbClr val="0F1E4A"/>
-                </a:solidFill>
-              </a:defRPr>
-            </a:pPr>
-            <a:r>
-              <a:t>• UDP Port Protocol Transport</a:t>
-            </a:r>
-          </a:p>
-          <a:p>
-            <a:pPr>
-              <a:spcAft>
-                <a:spcPts val="800"/>
-              </a:spcAft>
-              <a:defRPr sz="1300">
-                <a:solidFill>
-                  <a:srgbClr val="1E293B"/>
-                </a:solidFill>
-              </a:defRPr>
-            </a:pPr>
-            <a:r>
-              <a:t>   SNMP Manager sends requests to Agent on UDP Port 161; Agent sends unsolicited alerts (Traps) to Manager on UDP Port 162.</a:t>
+              <a:t>   1. **GetRequest**: Manager fetches value of 1 or more MIB variables from Agent. \n 2. **GetNextRequest**: Manager fetches the lexicographically next MIB variable (used for MIB tree walking and table traversal). \n 3. **GetBulkRequest (v2c/v3)**: Fetches large blocks of table rows in a single packet. \n 4. **SetRequest**: Manager sets/modifies configuration value on Agent device. \n 5. **Response**: Agent returns requested data values or error status. \n 6. **Trap / InformRequest**: Unsolicited alert sent by Agent to Manager upon an event (e.g., link failure, reboot). `InformRequest` requires Manager ACK.</a:t>
             </a:r>
           </a:p>
         </p:txBody>
@@ -3624,14 +3702,14 @@
         </p:nvSpPr>
         <p:spPr>
           <a:xfrm>
-            <a:off x="7955279" y="1280160"/>
-            <a:ext cx="3566160" cy="4846320"/>
+            <a:off x="7955279" y="1234440"/>
+            <a:ext cx="3566160" cy="4892040"/>
           </a:xfrm>
           <a:prstGeom prst="roundRect">
             <a:avLst/>
           </a:prstGeom>
           <a:solidFill>
-            <a:srgbClr val="F1F5F9"/>
+            <a:srgbClr val="F8FAFC"/>
           </a:solidFill>
           <a:ln w="19050">
             <a:solidFill>
@@ -3669,7 +3747,7 @@
         </p:nvSpPr>
         <p:spPr>
           <a:xfrm>
-            <a:off x="8138160" y="1417320"/>
+            <a:off x="8138160" y="1371600"/>
             <a:ext cx="3200400" cy="4572000"/>
           </a:xfrm>
           <a:prstGeom prst="rect">
@@ -3694,7 +3772,7 @@
               </a:defRPr>
             </a:pPr>
             <a:r>
-              <a:t>SNMP Core Elements</a:t>
+              <a:t>SNMP Ports &amp; PDUs</a:t>
             </a:r>
           </a:p>
           <a:p>
@@ -3704,12 +3782,12 @@
               </a:spcAft>
               <a:defRPr sz="1200">
                 <a:solidFill>
-                  <a:srgbClr val="1E293B"/>
+                  <a:srgbClr val="0F172A"/>
                 </a:solidFill>
               </a:defRPr>
             </a:pPr>
             <a:r>
-              <a:t>→ NMS: Central manager console</a:t>
+              <a:t>→ UDP Port 161: Agent listener</a:t>
             </a:r>
           </a:p>
           <a:p>
@@ -3719,12 +3797,12 @@
               </a:spcAft>
               <a:defRPr sz="1200">
                 <a:solidFill>
-                  <a:srgbClr val="1E293B"/>
+                  <a:srgbClr val="0F172A"/>
                 </a:solidFill>
               </a:defRPr>
             </a:pPr>
             <a:r>
-              <a:t>→ Agent: Software on managed node</a:t>
+              <a:t>→ UDP Port 162: Manager Trap listener</a:t>
             </a:r>
           </a:p>
           <a:p>
@@ -3734,12 +3812,12 @@
               </a:spcAft>
               <a:defRPr sz="1200">
                 <a:solidFill>
-                  <a:srgbClr val="1E293B"/>
+                  <a:srgbClr val="0F172A"/>
                 </a:solidFill>
               </a:defRPr>
             </a:pPr>
             <a:r>
-              <a:t>→ MIB: Device database variables</a:t>
+              <a:t>→ GetRequest: Read variable</a:t>
             </a:r>
           </a:p>
           <a:p>
@@ -3749,12 +3827,12 @@
               </a:spcAft>
               <a:defRPr sz="1200">
                 <a:solidFill>
-                  <a:srgbClr val="1E293B"/>
+                  <a:srgbClr val="0F172A"/>
                 </a:solidFill>
               </a:defRPr>
             </a:pPr>
             <a:r>
-              <a:t>→ Port 161 UDP: Requests (Get/Set)</a:t>
+              <a:t>→ SetRequest: Write configuration</a:t>
             </a:r>
           </a:p>
           <a:p>
@@ -3764,12 +3842,42 @@
               </a:spcAft>
               <a:defRPr sz="1200">
                 <a:solidFill>
-                  <a:srgbClr val="1E293B"/>
+                  <a:srgbClr val="0F172A"/>
                 </a:solidFill>
               </a:defRPr>
             </a:pPr>
             <a:r>
-              <a:t>→ Port 162 UDP: Alerts (Traps/Inform)</a:t>
+              <a:t>→ GetNext: Sequential MIB walk</a:t>
+            </a:r>
+          </a:p>
+          <a:p>
+            <a:pPr>
+              <a:spcAft>
+                <a:spcPts val="600"/>
+              </a:spcAft>
+              <a:defRPr sz="1200">
+                <a:solidFill>
+                  <a:srgbClr val="0F172A"/>
+                </a:solidFill>
+              </a:defRPr>
+            </a:pPr>
+            <a:r>
+              <a:t>→ GetBulk: Fast table download</a:t>
+            </a:r>
+          </a:p>
+          <a:p>
+            <a:pPr>
+              <a:spcAft>
+                <a:spcPts val="600"/>
+              </a:spcAft>
+              <a:defRPr sz="1200">
+                <a:solidFill>
+                  <a:srgbClr val="0F172A"/>
+                </a:solidFill>
+              </a:defRPr>
+            </a:pPr>
+            <a:r>
+              <a:t>→ Trap: Asynchronous alert</a:t>
             </a:r>
           </a:p>
         </p:txBody>
@@ -3782,8 +3890,8 @@
         </p:nvSpPr>
         <p:spPr>
           <a:xfrm>
-            <a:off x="731520" y="6309360"/>
-            <a:ext cx="10789920" cy="365760"/>
+            <a:off x="731520" y="6327648"/>
+            <a:ext cx="10789920" cy="320040"/>
           </a:xfrm>
           <a:prstGeom prst="rect">
             <a:avLst/>
@@ -3805,6 +3913,41 @@
             </a:pPr>
             <a:r>
               <a:t>PCCST501 Computer Networks | KTU 2024 Scheme | Prof. Anju Markose | Assistant Professor, Dept. of CSE | VJCET</a:t>
+            </a:r>
+          </a:p>
+        </p:txBody>
+      </p:sp>
+      <p:sp>
+        <p:nvSpPr>
+          <p:cNvPr id="10" name="TextBox 9"/>
+          <p:cNvSpPr txBox="1"/>
+          <p:nvPr/>
+        </p:nvSpPr>
+        <p:spPr>
+          <a:xfrm>
+            <a:off x="6858000" y="6327648"/>
+            <a:ext cx="4572000" cy="320040"/>
+          </a:xfrm>
+          <a:prstGeom prst="rect">
+            <a:avLst/>
+          </a:prstGeom>
+          <a:noFill/>
+        </p:spPr>
+        <p:txBody>
+          <a:bodyPr wrap="none">
+            <a:spAutoFit/>
+          </a:bodyPr>
+          <a:lstStyle/>
+          <a:p>
+            <a:pPr algn="r">
+              <a:defRPr sz="950">
+                <a:solidFill>
+                  <a:srgbClr val="64748B"/>
+                </a:solidFill>
+              </a:defRPr>
+            </a:pPr>
+            <a:r>
+              <a:t>Dept. of CSE, VJCET</a:t>
             </a:r>
           </a:p>
         </p:txBody>
@@ -3936,14 +4079,14 @@
           <a:lstStyle/>
           <a:p>
             <a:pPr>
-              <a:defRPr b="1" sz="2300">
+              <a:defRPr b="1" sz="2200">
                 <a:solidFill>
                   <a:srgbClr val="F8FAFC"/>
                 </a:solidFill>
               </a:defRPr>
             </a:pPr>
             <a:r>
-              <a:t>4.1.2 SNMP Protocol Operations</a:t>
+              <a:t>4.1.2 SNMP Version Evolution: SNMPv1 vs SNMPv2c vs SNMPv3</a:t>
             </a:r>
           </a:p>
         </p:txBody>
@@ -3978,264 +4121,31 @@
               </a:defRPr>
             </a:pPr>
             <a:r>
-              <a:t>M4.1 SNMP OPERATIONS</a:t>
-            </a:r>
-          </a:p>
-        </p:txBody>
-      </p:sp>
-      <p:sp>
-        <p:nvSpPr>
-          <p:cNvPr id="6" name="TextBox 5"/>
-          <p:cNvSpPr txBox="1"/>
-          <p:nvPr/>
-        </p:nvSpPr>
-        <p:spPr>
-          <a:xfrm>
-            <a:off x="731520" y="1280160"/>
-            <a:ext cx="6858000" cy="4937760"/>
-          </a:xfrm>
-          <a:prstGeom prst="rect">
-            <a:avLst/>
-          </a:prstGeom>
-          <a:noFill/>
-        </p:spPr>
-        <p:txBody>
-          <a:bodyPr wrap="square">
-            <a:spAutoFit/>
-          </a:bodyPr>
-          <a:lstStyle/>
-          <a:p>
-            <a:pPr>
-              <a:spcAft>
-                <a:spcPts val="200"/>
-              </a:spcAft>
-              <a:defRPr b="1" sz="1500">
-                <a:solidFill>
-                  <a:srgbClr val="0F1E4A"/>
-                </a:solidFill>
-              </a:defRPr>
-            </a:pPr>
-            <a:r>
-              <a:t>• `GetRequest`</a:t>
-            </a:r>
-          </a:p>
-          <a:p>
-            <a:pPr>
-              <a:spcAft>
-                <a:spcPts val="800"/>
-              </a:spcAft>
-              <a:defRPr sz="1300">
-                <a:solidFill>
-                  <a:srgbClr val="1E293B"/>
-                </a:solidFill>
-              </a:defRPr>
-            </a:pPr>
-            <a:r>
-              <a:t>   Manager requests value of one or more specific MIB variables by OID from Agent.</a:t>
-            </a:r>
-          </a:p>
-          <a:p>
-            <a:pPr>
-              <a:spcAft>
-                <a:spcPts val="200"/>
-              </a:spcAft>
-              <a:defRPr b="1" sz="1500">
-                <a:solidFill>
-                  <a:srgbClr val="0F1E4A"/>
-                </a:solidFill>
-              </a:defRPr>
-            </a:pPr>
-            <a:r>
-              <a:t>• `GetNextRequest`</a:t>
-            </a:r>
-          </a:p>
-          <a:p>
-            <a:pPr>
-              <a:spcAft>
-                <a:spcPts val="800"/>
-              </a:spcAft>
-              <a:defRPr sz="1300">
-                <a:solidFill>
-                  <a:srgbClr val="1E293B"/>
-                </a:solidFill>
-              </a:defRPr>
-            </a:pPr>
-            <a:r>
-              <a:t>   Manager requests value of lexicographically next object in MIB tree (used for table traversal / walk).</a:t>
-            </a:r>
-          </a:p>
-          <a:p>
-            <a:pPr>
-              <a:spcAft>
-                <a:spcPts val="200"/>
-              </a:spcAft>
-              <a:defRPr b="1" sz="1500">
-                <a:solidFill>
-                  <a:srgbClr val="0F1E4A"/>
-                </a:solidFill>
-              </a:defRPr>
-            </a:pPr>
-            <a:r>
-              <a:t>• `GetBulkRequest` (SNMPv2/v3)</a:t>
-            </a:r>
-          </a:p>
-          <a:p>
-            <a:pPr>
-              <a:spcAft>
-                <a:spcPts val="800"/>
-              </a:spcAft>
-              <a:defRPr sz="1300">
-                <a:solidFill>
-                  <a:srgbClr val="1E293B"/>
-                </a:solidFill>
-              </a:defRPr>
-            </a:pPr>
-            <a:r>
-              <a:t>   Manager efficiently fetches large blocks of tabular data in a single PDU response, minimizing network roundtrips.</a:t>
-            </a:r>
-          </a:p>
-          <a:p>
-            <a:pPr>
-              <a:spcAft>
-                <a:spcPts val="200"/>
-              </a:spcAft>
-              <a:defRPr b="1" sz="1500">
-                <a:solidFill>
-                  <a:srgbClr val="0F1E4A"/>
-                </a:solidFill>
-              </a:defRPr>
-            </a:pPr>
-            <a:r>
-              <a:t>• `SetRequest`</a:t>
-            </a:r>
-          </a:p>
-          <a:p>
-            <a:pPr>
-              <a:spcAft>
-                <a:spcPts val="800"/>
-              </a:spcAft>
-              <a:defRPr sz="1300">
-                <a:solidFill>
-                  <a:srgbClr val="1E293B"/>
-                </a:solidFill>
-              </a:defRPr>
-            </a:pPr>
-            <a:r>
-              <a:t>   Manager writes a new value to a MIB variable to reconfigure device state (e.g. enable/disable an interface).</a:t>
-            </a:r>
-          </a:p>
-          <a:p>
-            <a:pPr>
-              <a:spcAft>
-                <a:spcPts val="200"/>
-              </a:spcAft>
-              <a:defRPr b="1" sz="1500">
-                <a:solidFill>
-                  <a:srgbClr val="0F1E4A"/>
-                </a:solidFill>
-              </a:defRPr>
-            </a:pPr>
-            <a:r>
-              <a:t>• `Response`</a:t>
-            </a:r>
-          </a:p>
-          <a:p>
-            <a:pPr>
-              <a:spcAft>
-                <a:spcPts val="800"/>
-              </a:spcAft>
-              <a:defRPr sz="1300">
-                <a:solidFill>
-                  <a:srgbClr val="1E293B"/>
-                </a:solidFill>
-              </a:defRPr>
-            </a:pPr>
-            <a:r>
-              <a:t>   Agent replies to Manager with requested data values or error status.</a:t>
-            </a:r>
-          </a:p>
-          <a:p>
-            <a:pPr>
-              <a:spcAft>
-                <a:spcPts val="200"/>
-              </a:spcAft>
-              <a:defRPr b="1" sz="1500">
-                <a:solidFill>
-                  <a:srgbClr val="0F1E4A"/>
-                </a:solidFill>
-              </a:defRPr>
-            </a:pPr>
-            <a:r>
-              <a:t>• `Trap` (Unsolicited Alert)</a:t>
-            </a:r>
-          </a:p>
-          <a:p>
-            <a:pPr>
-              <a:spcAft>
-                <a:spcPts val="800"/>
-              </a:spcAft>
-              <a:defRPr sz="1300">
-                <a:solidFill>
-                  <a:srgbClr val="1E293B"/>
-                </a:solidFill>
-              </a:defRPr>
-            </a:pPr>
-            <a:r>
-              <a:t>   Agent proactively sends alert to NMS reporting an asynchronous critical event (e.g. link down, power supply failure, authentication failure). Unacknowledged.</a:t>
-            </a:r>
-          </a:p>
-          <a:p>
-            <a:pPr>
-              <a:spcAft>
-                <a:spcPts val="200"/>
-              </a:spcAft>
-              <a:defRPr b="1" sz="1500">
-                <a:solidFill>
-                  <a:srgbClr val="0F1E4A"/>
-                </a:solidFill>
-              </a:defRPr>
-            </a:pPr>
-            <a:r>
-              <a:t>• `InformRequest` (SNMPv2/v3)</a:t>
-            </a:r>
-          </a:p>
-          <a:p>
-            <a:pPr>
-              <a:spcAft>
-                <a:spcPts val="800"/>
-              </a:spcAft>
-              <a:defRPr sz="1300">
-                <a:solidFill>
-                  <a:srgbClr val="1E293B"/>
-                </a:solidFill>
-              </a:defRPr>
-            </a:pPr>
-            <a:r>
-              <a:t>   Manager-to-Manager or Agent-to-Manager acknowledged trap.</a:t>
-            </a:r>
-          </a:p>
-        </p:txBody>
-      </p:sp>
-      <p:sp>
-        <p:nvSpPr>
-          <p:cNvPr id="7" name="Rounded Rectangle 6"/>
+              <a:t>M4.1 SNMP EVOLUTION</a:t>
+            </a:r>
+          </a:p>
+        </p:txBody>
+      </p:sp>
+      <p:sp>
+        <p:nvSpPr>
+          <p:cNvPr id="6" name="Rounded Rectangle 5"/>
           <p:cNvSpPr/>
           <p:nvPr/>
         </p:nvSpPr>
         <p:spPr>
           <a:xfrm>
-            <a:off x="7955279" y="1280160"/>
-            <a:ext cx="3566160" cy="4846320"/>
+            <a:off x="731520" y="1234440"/>
+            <a:ext cx="5212080" cy="4892040"/>
           </a:xfrm>
           <a:prstGeom prst="roundRect">
             <a:avLst/>
           </a:prstGeom>
           <a:solidFill>
-            <a:srgbClr val="F1F5F9"/>
+            <a:srgbClr val="F8FAFC"/>
           </a:solidFill>
           <a:ln w="19050">
             <a:solidFill>
-              <a:srgbClr val="0E7490"/>
+              <a:srgbClr val="0F1E4A"/>
             </a:solidFill>
           </a:ln>
         </p:spPr>
@@ -4263,14 +4173,14 @@
       </p:sp>
       <p:sp>
         <p:nvSpPr>
-          <p:cNvPr id="8" name="TextBox 7"/>
+          <p:cNvPr id="7" name="TextBox 6"/>
           <p:cNvSpPr txBox="1"/>
           <p:nvPr/>
         </p:nvSpPr>
         <p:spPr>
           <a:xfrm>
-            <a:off x="8138160" y="1417320"/>
-            <a:ext cx="3200400" cy="4572000"/>
+            <a:off x="914400" y="1371600"/>
+            <a:ext cx="4846320" cy="4572000"/>
           </a:xfrm>
           <a:prstGeom prst="rect">
             <a:avLst/>
@@ -4287,105 +4197,120 @@
               <a:spcAft>
                 <a:spcPts val="1000"/>
               </a:spcAft>
-              <a:defRPr b="1" sz="1500">
-                <a:solidFill>
-                  <a:srgbClr val="0E7490"/>
+              <a:defRPr b="1" sz="1550">
+                <a:solidFill>
+                  <a:srgbClr val="0F1E4A"/>
                 </a:solidFill>
               </a:defRPr>
             </a:pPr>
             <a:r>
-              <a:t>Operation Summary</a:t>
+              <a:t>SNMPv1 &amp; SNMPv2c</a:t>
             </a:r>
           </a:p>
           <a:p>
             <a:pPr>
               <a:spcAft>
-                <a:spcPts val="600"/>
+                <a:spcPts val="500"/>
               </a:spcAft>
               <a:defRPr sz="1200">
                 <a:solidFill>
-                  <a:srgbClr val="1E293B"/>
+                  <a:srgbClr val="0F172A"/>
                 </a:solidFill>
               </a:defRPr>
             </a:pPr>
             <a:r>
-              <a:t>→ GetRequest: Fetch variable</a:t>
+              <a:t>• Security Model: Plaintext Community Strings (`public` for read-only, `private` for read-write). Vulnerable to packet sniffing</a:t>
             </a:r>
           </a:p>
           <a:p>
             <a:pPr>
               <a:spcAft>
-                <a:spcPts val="600"/>
+                <a:spcPts val="500"/>
               </a:spcAft>
               <a:defRPr sz="1200">
                 <a:solidFill>
-                  <a:srgbClr val="1E293B"/>
+                  <a:srgbClr val="0F172A"/>
                 </a:solidFill>
               </a:defRPr>
             </a:pPr>
             <a:r>
-              <a:t>→ GetNextRequest: Tree traversal</a:t>
+              <a:t>• Operations (v1): Get, GetNext, Set, Response, Trap</a:t>
             </a:r>
           </a:p>
           <a:p>
             <a:pPr>
               <a:spcAft>
-                <a:spcPts val="600"/>
+                <a:spcPts val="500"/>
               </a:spcAft>
               <a:defRPr sz="1200">
                 <a:solidFill>
-                  <a:srgbClr val="1E293B"/>
+                  <a:srgbClr val="0F172A"/>
                 </a:solidFill>
               </a:defRPr>
             </a:pPr>
             <a:r>
-              <a:t>→ GetBulkRequest: Table retrieval</a:t>
+              <a:t>• Enhancements (v2c): Adds `GetBulkRequest` for fast table fetching and 64-bit high-capacity counters (`Counter64`), but retains plaintext community security</a:t>
             </a:r>
           </a:p>
           <a:p>
             <a:pPr>
               <a:spcAft>
-                <a:spcPts val="600"/>
+                <a:spcPts val="500"/>
               </a:spcAft>
               <a:defRPr sz="1200">
                 <a:solidFill>
-                  <a:srgbClr val="1E293B"/>
+                  <a:srgbClr val="0F172A"/>
                 </a:solidFill>
               </a:defRPr>
             </a:pPr>
             <a:r>
-              <a:t>→ SetRequest: Modify configuration</a:t>
-            </a:r>
-          </a:p>
-          <a:p>
-            <a:pPr>
-              <a:spcAft>
-                <a:spcPts val="600"/>
-              </a:spcAft>
-              <a:defRPr sz="1200">
-                <a:solidFill>
-                  <a:srgbClr val="1E293B"/>
-                </a:solidFill>
-              </a:defRPr>
-            </a:pPr>
-            <a:r>
-              <a:t>→ Trap: Unsolicited async event</a:t>
-            </a:r>
-          </a:p>
-          <a:p>
-            <a:pPr>
-              <a:spcAft>
-                <a:spcPts val="600"/>
-              </a:spcAft>
-              <a:defRPr sz="1200">
-                <a:solidFill>
-                  <a:srgbClr val="1E293B"/>
-                </a:solidFill>
-              </a:defRPr>
-            </a:pPr>
-            <a:r>
-              <a:t>→ InformRequest: Acknowledged trap</a:t>
-            </a:r>
+              <a:t>• Suitability: Isolated, trusted internal LANs only</a:t>
+            </a:r>
+          </a:p>
+        </p:txBody>
+      </p:sp>
+      <p:sp>
+        <p:nvSpPr>
+          <p:cNvPr id="8" name="Rounded Rectangle 7"/>
+          <p:cNvSpPr/>
+          <p:nvPr/>
+        </p:nvSpPr>
+        <p:spPr>
+          <a:xfrm>
+            <a:off x="6309360" y="1234440"/>
+            <a:ext cx="5212080" cy="4892040"/>
+          </a:xfrm>
+          <a:prstGeom prst="roundRect">
+            <a:avLst/>
+          </a:prstGeom>
+          <a:solidFill>
+            <a:srgbClr val="EEF2FF"/>
+          </a:solidFill>
+          <a:ln w="19050">
+            <a:solidFill>
+              <a:srgbClr val="0E7490"/>
+            </a:solidFill>
+          </a:ln>
+        </p:spPr>
+        <p:style>
+          <a:lnRef idx="1">
+            <a:schemeClr val="accent1"/>
+          </a:lnRef>
+          <a:fillRef idx="3">
+            <a:schemeClr val="accent1"/>
+          </a:fillRef>
+          <a:effectRef idx="2">
+            <a:schemeClr val="accent1"/>
+          </a:effectRef>
+          <a:fontRef idx="minor">
+            <a:schemeClr val="lt1"/>
+          </a:fontRef>
+        </p:style>
+        <p:txBody>
+          <a:bodyPr rtlCol="0" anchor="ctr"/>
+          <a:lstStyle/>
+          <a:p>
+            <a:pPr algn="ctr"/>
           </a:p>
         </p:txBody>
       </p:sp>
@@ -4397,8 +4322,8 @@
         </p:nvSpPr>
         <p:spPr>
           <a:xfrm>
-            <a:off x="731520" y="6309360"/>
-            <a:ext cx="10789920" cy="365760"/>
+            <a:off x="6492240" y="1371600"/>
+            <a:ext cx="4846320" cy="4572000"/>
           </a:xfrm>
           <a:prstGeom prst="rect">
             <a:avLst/>
@@ -4406,6 +4331,119 @@
           <a:noFill/>
         </p:spPr>
         <p:txBody>
+          <a:bodyPr wrap="square">
+            <a:spAutoFit/>
+          </a:bodyPr>
+          <a:lstStyle/>
+          <a:p>
+            <a:pPr>
+              <a:spcAft>
+                <a:spcPts val="1000"/>
+              </a:spcAft>
+              <a:defRPr b="1" sz="1550">
+                <a:solidFill>
+                  <a:srgbClr val="0E7490"/>
+                </a:solidFill>
+              </a:defRPr>
+            </a:pPr>
+            <a:r>
+              <a:t>SNMPv3 (Cryptographically Secure)</a:t>
+            </a:r>
+          </a:p>
+          <a:p>
+            <a:pPr>
+              <a:spcAft>
+                <a:spcPts val="500"/>
+              </a:spcAft>
+              <a:defRPr sz="1200">
+                <a:solidFill>
+                  <a:srgbClr val="0F172A"/>
+                </a:solidFill>
+              </a:defRPr>
+            </a:pPr>
+            <a:r>
+              <a:t>• Security Model: User-Based Security Model (USM) + View-Based Access Control Model (VACM)</a:t>
+            </a:r>
+          </a:p>
+          <a:p>
+            <a:pPr>
+              <a:spcAft>
+                <a:spcPts val="500"/>
+              </a:spcAft>
+              <a:defRPr sz="1200">
+                <a:solidFill>
+                  <a:srgbClr val="0F172A"/>
+                </a:solidFill>
+              </a:defRPr>
+            </a:pPr>
+            <a:r>
+              <a:t>• Authentication: Message digest authentication via HMAC-MD5 or HMAC-SHA (verifies origin and prevents tampering)</a:t>
+            </a:r>
+          </a:p>
+          <a:p>
+            <a:pPr>
+              <a:spcAft>
+                <a:spcPts val="500"/>
+              </a:spcAft>
+              <a:defRPr sz="1200">
+                <a:solidFill>
+                  <a:srgbClr val="0F172A"/>
+                </a:solidFill>
+              </a:defRPr>
+            </a:pPr>
+            <a:r>
+              <a:t>• Confidentiality: Payload encryption via DES or AES-128 / AES-256 (prevents eavesdropping)</a:t>
+            </a:r>
+          </a:p>
+          <a:p>
+            <a:pPr>
+              <a:spcAft>
+                <a:spcPts val="500"/>
+              </a:spcAft>
+              <a:defRPr sz="1200">
+                <a:solidFill>
+                  <a:srgbClr val="0F172A"/>
+                </a:solidFill>
+              </a:defRPr>
+            </a:pPr>
+            <a:r>
+              <a:t>• Message Freshness: Timestamps and boot counters prevent Replay attacks</a:t>
+            </a:r>
+          </a:p>
+          <a:p>
+            <a:pPr>
+              <a:spcAft>
+                <a:spcPts val="500"/>
+              </a:spcAft>
+              <a:defRPr sz="1200">
+                <a:solidFill>
+                  <a:srgbClr val="0F172A"/>
+                </a:solidFill>
+              </a:defRPr>
+            </a:pPr>
+            <a:r>
+              <a:t>• Enterprise Standard: Mandatory standard for secure network management</a:t>
+            </a:r>
+          </a:p>
+        </p:txBody>
+      </p:sp>
+      <p:sp>
+        <p:nvSpPr>
+          <p:cNvPr id="10" name="TextBox 9"/>
+          <p:cNvSpPr txBox="1"/>
+          <p:nvPr/>
+        </p:nvSpPr>
+        <p:spPr>
+          <a:xfrm>
+            <a:off x="731520" y="6327648"/>
+            <a:ext cx="10789920" cy="320040"/>
+          </a:xfrm>
+          <a:prstGeom prst="rect">
+            <a:avLst/>
+          </a:prstGeom>
+          <a:noFill/>
+        </p:spPr>
+        <p:txBody>
           <a:bodyPr wrap="none">
             <a:spAutoFit/>
           </a:bodyPr>
@@ -4420,6 +4458,41 @@
             </a:pPr>
             <a:r>
               <a:t>PCCST501 Computer Networks | KTU 2024 Scheme | Prof. Anju Markose | Assistant Professor, Dept. of CSE | VJCET</a:t>
+            </a:r>
+          </a:p>
+        </p:txBody>
+      </p:sp>
+      <p:sp>
+        <p:nvSpPr>
+          <p:cNvPr id="11" name="TextBox 10"/>
+          <p:cNvSpPr txBox="1"/>
+          <p:nvPr/>
+        </p:nvSpPr>
+        <p:spPr>
+          <a:xfrm>
+            <a:off x="6858000" y="6327648"/>
+            <a:ext cx="4572000" cy="320040"/>
+          </a:xfrm>
+          <a:prstGeom prst="rect">
+            <a:avLst/>
+          </a:prstGeom>
+          <a:noFill/>
+        </p:spPr>
+        <p:txBody>
+          <a:bodyPr wrap="none">
+            <a:spAutoFit/>
+          </a:bodyPr>
+          <a:lstStyle/>
+          <a:p>
+            <a:pPr algn="r">
+              <a:defRPr sz="950">
+                <a:solidFill>
+                  <a:srgbClr val="64748B"/>
+                </a:solidFill>
+              </a:defRPr>
+            </a:pPr>
+            <a:r>
+              <a:t>Dept. of CSE, VJCET</a:t>
             </a:r>
           </a:p>
         </p:txBody>
@@ -4551,14 +4624,14 @@
           <a:lstStyle/>
           <a:p>
             <a:pPr>
-              <a:defRPr b="1" sz="2300">
+              <a:defRPr b="1" sz="2100">
                 <a:solidFill>
                   <a:srgbClr val="F8FAFC"/>
                 </a:solidFill>
               </a:defRPr>
             </a:pPr>
             <a:r>
-              <a:t>4.1.3 Evolution of SNMP: SNMPv1 vs SNMPv2c vs SNMPv3</a:t>
+              <a:t>🎯 Exam Booster &amp; Review: Network Management &amp; SNMP</a:t>
             </a:r>
           </a:p>
         </p:txBody>
@@ -4593,7 +4666,7 @@
               </a:defRPr>
             </a:pPr>
             <a:r>
-              <a:t>M4.1 SNMP EVOLUTION</a:t>
+              <a:t>M4.1</a:t>
             </a:r>
           </a:p>
         </p:txBody>
@@ -4606,18 +4679,18 @@
         </p:nvSpPr>
         <p:spPr>
           <a:xfrm>
-            <a:off x="731520" y="1280160"/>
-            <a:ext cx="5212080" cy="4846320"/>
+            <a:off x="731520" y="1234440"/>
+            <a:ext cx="5303520" cy="4892040"/>
           </a:xfrm>
           <a:prstGeom prst="roundRect">
             <a:avLst/>
           </a:prstGeom>
           <a:solidFill>
-            <a:srgbClr val="F1F5F9"/>
+            <a:srgbClr val="FEF3C7"/>
           </a:solidFill>
           <a:ln w="19050">
             <a:solidFill>
-              <a:srgbClr val="0E7490"/>
+              <a:srgbClr val="D97706"/>
             </a:solidFill>
           </a:ln>
         </p:spPr>
@@ -4651,8 +4724,8 @@
         </p:nvSpPr>
         <p:spPr>
           <a:xfrm>
-            <a:off x="914400" y="1417320"/>
-            <a:ext cx="4846320" cy="4572000"/>
+            <a:off x="914400" y="1371600"/>
+            <a:ext cx="4937760" cy="4572000"/>
           </a:xfrm>
           <a:prstGeom prst="rect">
             <a:avLst/>
@@ -4667,61 +4740,61 @@
           <a:p>
             <a:pPr>
               <a:spcAft>
-                <a:spcPts val="1200"/>
+                <a:spcPts val="1000"/>
               </a:spcAft>
-              <a:defRPr b="1" sz="1600">
-                <a:solidFill>
-                  <a:srgbClr val="0F1E4A"/>
+              <a:defRPr b="1" sz="1450">
+                <a:solidFill>
+                  <a:srgbClr val="D97706"/>
                 </a:solidFill>
               </a:defRPr>
             </a:pPr>
             <a:r>
-              <a:t>SNMPv1 &amp; SNMPv2c (Legacy)</a:t>
+              <a:t>📚 KTU High-Yield Questions (K2 Understand)</a:t>
             </a:r>
           </a:p>
           <a:p>
             <a:pPr>
               <a:spcAft>
-                <a:spcPts val="600"/>
+                <a:spcPts val="700"/>
               </a:spcAft>
-              <a:defRPr sz="1250">
-                <a:solidFill>
-                  <a:srgbClr val="1E293B"/>
+              <a:defRPr sz="1200">
+                <a:solidFill>
+                  <a:srgbClr val="0F172A"/>
                 </a:solidFill>
               </a:defRPr>
             </a:pPr>
             <a:r>
-              <a:t>• Authentication: Plaintext Community Strings (`public` for read, `private` for write) transmitted in cleartext</a:t>
+              <a:t>Q: Explain the four components of the Network Management architecture (Manager, Agent, MIB, SNMP) with a neat diagram. (7 Marks)</a:t>
             </a:r>
           </a:p>
           <a:p>
             <a:pPr>
               <a:spcAft>
-                <a:spcPts val="600"/>
+                <a:spcPts val="700"/>
               </a:spcAft>
-              <a:defRPr sz="1250">
-                <a:solidFill>
-                  <a:srgbClr val="1E293B"/>
+              <a:defRPr sz="1200">
+                <a:solidFill>
+                  <a:srgbClr val="0F172A"/>
                 </a:solidFill>
               </a:defRPr>
             </a:pPr>
             <a:r>
-              <a:t>• Security: Vulnerable to packet sniffing, replay attacks, and unauthorized configuration modification</a:t>
+              <a:t>Q: Describe the various SNMP protocol operations (GetRequest, GetNextRequest, GetBulkRequest, SetRequest, Trap, InformRequest). (8 Marks)</a:t>
             </a:r>
           </a:p>
           <a:p>
             <a:pPr>
               <a:spcAft>
-                <a:spcPts val="600"/>
+                <a:spcPts val="700"/>
               </a:spcAft>
-              <a:defRPr sz="1250">
-                <a:solidFill>
-                  <a:srgbClr val="1E293B"/>
+              <a:defRPr sz="1200">
+                <a:solidFill>
+                  <a:srgbClr val="0F172A"/>
                 </a:solidFill>
               </a:defRPr>
             </a:pPr>
             <a:r>
-              <a:t>• Data Types: v1: 32-bit counters only (rollover in 34s on 1 Gbps links!). v2c: Added 64-bit counters (`Counter64`) &amp; `GetBulkRequest`</a:t>
+              <a:t>Q: Compare SNMPv1, SNMPv2c, and SNMPv3 with focus on the User-Based Security Model (USM) in SNMPv3. (7 Marks)</a:t>
             </a:r>
           </a:p>
         </p:txBody>
@@ -4734,8 +4807,8 @@
         </p:nvSpPr>
         <p:spPr>
           <a:xfrm>
-            <a:off x="6309360" y="1280160"/>
-            <a:ext cx="5212080" cy="4846320"/>
+            <a:off x="6309360" y="1234440"/>
+            <a:ext cx="5212080" cy="4892040"/>
           </a:xfrm>
           <a:prstGeom prst="roundRect">
             <a:avLst/>
@@ -4745,7 +4818,7 @@
           </a:solidFill>
           <a:ln w="19050">
             <a:solidFill>
-              <a:srgbClr val="0F1E4A"/>
+              <a:srgbClr val="0E7490"/>
             </a:solidFill>
           </a:ln>
         </p:spPr>
@@ -4779,7 +4852,7 @@
         </p:nvSpPr>
         <p:spPr>
           <a:xfrm>
-            <a:off x="6492240" y="1417320"/>
+            <a:off x="6492240" y="1371600"/>
             <a:ext cx="4846320" cy="4572000"/>
           </a:xfrm>
           <a:prstGeom prst="rect">
@@ -4795,16 +4868,16 @@
           <a:p>
             <a:pPr>
               <a:spcAft>
-                <a:spcPts val="1200"/>
+                <a:spcPts val="1000"/>
               </a:spcAft>
-              <a:defRPr b="1" sz="1600">
+              <a:defRPr b="1" sz="1450">
                 <a:solidFill>
                   <a:srgbClr val="0E7490"/>
                 </a:solidFill>
               </a:defRPr>
             </a:pPr>
             <a:r>
-              <a:t>SNMPv3 (Modern Standard - RFC 3411)</a:t>
+              <a:t>💡 Critical Conceptual Takeaways</a:t>
             </a:r>
           </a:p>
           <a:p>
@@ -4812,14 +4885,14 @@
               <a:spcAft>
                 <a:spcPts val="600"/>
               </a:spcAft>
-              <a:defRPr sz="1250">
-                <a:solidFill>
-                  <a:srgbClr val="1E293B"/>
+              <a:defRPr sz="1200">
+                <a:solidFill>
+                  <a:srgbClr val="0F172A"/>
                 </a:solidFill>
               </a:defRPr>
             </a:pPr>
             <a:r>
-              <a:t>• User-based Security Model (USM): Provides Message Integrity (HMAC-MD5/SHA) and Confidentiality (DES/AES-128/256 payload encryption)</a:t>
+              <a:t>✔ SNMP uses UDP port 161 for synchronous polling and port 162 for asynchronous event Traps.</a:t>
             </a:r>
           </a:p>
           <a:p>
@@ -4827,14 +4900,14 @@
               <a:spcAft>
                 <a:spcPts val="600"/>
               </a:spcAft>
-              <a:defRPr sz="1250">
-                <a:solidFill>
-                  <a:srgbClr val="1E293B"/>
+              <a:defRPr sz="1200">
+                <a:solidFill>
+                  <a:srgbClr val="0F172A"/>
                 </a:solidFill>
               </a:defRPr>
             </a:pPr>
             <a:r>
-              <a:t>• View-based Access Control (VACM): Defines granular read/write access permissions per user group for specific MIB subtrees</a:t>
+              <a:t>✔ SNMPv2c introduced `GetBulk` and 64-bit counters; SNMPv3 added cryptographic authentication and AES encryption.</a:t>
             </a:r>
           </a:p>
           <a:p>
@@ -4842,14 +4915,14 @@
               <a:spcAft>
                 <a:spcPts val="600"/>
               </a:spcAft>
-              <a:defRPr sz="1250">
-                <a:solidFill>
-                  <a:srgbClr val="1E293B"/>
+              <a:defRPr sz="1200">
+                <a:solidFill>
+                  <a:srgbClr val="0F172A"/>
                 </a:solidFill>
               </a:defRPr>
             </a:pPr>
             <a:r>
-              <a:t>• Anti-Replay: Timestamps and boot counters prevent replaying captured SNMP packets</a:t>
+              <a:t>✔ `InformRequest` provides reliable delivery of trap notifications with manager acknowledgments.</a:t>
             </a:r>
           </a:p>
         </p:txBody>
@@ -4862,8 +4935,8 @@
         </p:nvSpPr>
         <p:spPr>
           <a:xfrm>
-            <a:off x="731520" y="6309360"/>
-            <a:ext cx="10789920" cy="365760"/>
+            <a:off x="731520" y="6327648"/>
+            <a:ext cx="10789920" cy="320040"/>
           </a:xfrm>
           <a:prstGeom prst="rect">
             <a:avLst/>
@@ -4885,6 +4958,41 @@
             </a:pPr>
             <a:r>
               <a:t>PCCST501 Computer Networks | KTU 2024 Scheme | Prof. Anju Markose | Assistant Professor, Dept. of CSE | VJCET</a:t>
+            </a:r>
+          </a:p>
+        </p:txBody>
+      </p:sp>
+      <p:sp>
+        <p:nvSpPr>
+          <p:cNvPr id="11" name="TextBox 10"/>
+          <p:cNvSpPr txBox="1"/>
+          <p:nvPr/>
+        </p:nvSpPr>
+        <p:spPr>
+          <a:xfrm>
+            <a:off x="6858000" y="6327648"/>
+            <a:ext cx="4572000" cy="320040"/>
+          </a:xfrm>
+          <a:prstGeom prst="rect">
+            <a:avLst/>
+          </a:prstGeom>
+          <a:noFill/>
+        </p:spPr>
+        <p:txBody>
+          <a:bodyPr wrap="none">
+            <a:spAutoFit/>
+          </a:bodyPr>
+          <a:lstStyle/>
+          <a:p>
+            <a:pPr algn="r">
+              <a:defRPr sz="950">
+                <a:solidFill>
+                  <a:srgbClr val="64748B"/>
+                </a:solidFill>
+              </a:defRPr>
+            </a:pPr>
+            <a:r>
+              <a:t>Dept. of CSE, VJCET</a:t>
             </a:r>
           </a:p>
         </p:txBody>
